--- a/presentaciones-html/clase-2/clase-2.pptx
+++ b/presentaciones-html/clase-2/clase-2.pptx
@@ -9351,7 +9351,7 @@
                 </a:solidFill>
                 <a:latin typeface="Calibri"/>
               </a:rPr>
-              <a:t>INGENIERÍA DE SOFTWARE I</a:t>
+              <a:t>UNIDAD II – MODELOS DE DESARROLLO DE SOFTWARE Y DESARROLLO RÁPIDO DEL SOFTWARE</a:t>
             </a:r>
           </a:p>
         </p:txBody>
@@ -9365,41 +9365,6 @@
         <p:spPr>
           <a:xfrm>
             <a:off x="502920" y="2651760"/>
-            <a:ext cx="11155680" cy="457200"/>
-          </a:xfrm>
-          <a:prstGeom prst="rect">
-            <a:avLst/>
-          </a:prstGeom>
-          <a:noFill/>
-        </p:spPr>
-        <p:txBody>
-          <a:bodyPr wrap="square" anchor="t" lIns="0" rIns="0" tIns="0" bIns="0">
-            <a:spAutoFit/>
-          </a:bodyPr>
-          <a:lstStyle/>
-          <a:p>
-            <a:pPr algn="l"/>
-            <a:r>
-              <a:rPr sz="1900" b="1" i="0">
-                <a:solidFill>
-                  <a:srgbClr val="2C4A8A"/>
-                </a:solidFill>
-                <a:latin typeface="Calibri"/>
-              </a:rPr>
-              <a:t>UNIDAD II – MODELOS DE DESARROLLO DE SOFTWARE Y DESARROLLO RÁPIDO DEL SOFTWARE</a:t>
-            </a:r>
-          </a:p>
-        </p:txBody>
-      </p:sp>
-      <p:sp>
-        <p:nvSpPr>
-          <p:cNvPr id="11" name="TextBox 10"/>
-          <p:cNvSpPr txBox="1"/>
-          <p:nvPr/>
-        </p:nvSpPr>
-        <p:spPr>
-          <a:xfrm>
-            <a:off x="502920" y="3163824"/>
             <a:ext cx="11155680" cy="347472"/>
           </a:xfrm>
           <a:prstGeom prst="rect">
@@ -31795,41 +31760,6 @@
         <p:spPr>
           <a:xfrm>
             <a:off x="502920" y="2286000"/>
-            <a:ext cx="11155680" cy="329184"/>
-          </a:xfrm>
-          <a:prstGeom prst="rect">
-            <a:avLst/>
-          </a:prstGeom>
-          <a:noFill/>
-        </p:spPr>
-        <p:txBody>
-          <a:bodyPr wrap="square" anchor="t" lIns="0" rIns="0" tIns="0" bIns="0">
-            <a:spAutoFit/>
-          </a:bodyPr>
-          <a:lstStyle/>
-          <a:p>
-            <a:pPr algn="l"/>
-            <a:r>
-              <a:rPr sz="1300" b="1" i="0">
-                <a:solidFill>
-                  <a:srgbClr val="2C4A8A"/>
-                </a:solidFill>
-                <a:latin typeface="Calibri"/>
-              </a:rPr>
-              <a:t>MUCHAS GRACIAS</a:t>
-            </a:r>
-          </a:p>
-        </p:txBody>
-      </p:sp>
-      <p:sp>
-        <p:nvSpPr>
-          <p:cNvPr id="10" name="TextBox 9"/>
-          <p:cNvSpPr txBox="1"/>
-          <p:nvPr/>
-        </p:nvSpPr>
-        <p:spPr>
-          <a:xfrm>
-            <a:off x="502920" y="2651760"/>
             <a:ext cx="11155680" cy="457200"/>
           </a:xfrm>
           <a:prstGeom prst="rect">
